--- a/Duruo Li_Missing Middle Problem.pptx
+++ b/Duruo Li_Missing Middle Problem.pptx
@@ -742,6 +742,90 @@
     <p:extLst>
       <p:ext uri="{BB962C8B-B14F-4D97-AF65-F5344CB8AC3E}">
         <p14:creationId xmlns:p14="http://schemas.microsoft.com/office/powerpoint/2010/main" val="3679173587"/>
+      </p:ext>
+    </p:extLst>
+  </p:cSld>
+  <p:clrMapOvr>
+    <a:masterClrMapping/>
+  </p:clrMapOvr>
+</p:notes>
+</file>
+
+<file path=ppt/notesSlides/notesSlide4.xml><?xml version="1.0" encoding="utf-8"?>
+<p:notes xmlns:a="http://schemas.openxmlformats.org/drawingml/2006/main" xmlns:r="http://schemas.openxmlformats.org/officeDocument/2006/relationships" xmlns:p="http://schemas.openxmlformats.org/presentationml/2006/main">
+  <p:cSld>
+    <p:spTree>
+      <p:nvGrpSpPr>
+        <p:cNvPr id="1" name=""/>
+        <p:cNvGrpSpPr/>
+        <p:nvPr/>
+      </p:nvGrpSpPr>
+      <p:grpSpPr>
+        <a:xfrm>
+          <a:off x="0" y="0"/>
+          <a:ext cx="0" cy="0"/>
+          <a:chOff x="0" y="0"/>
+          <a:chExt cx="0" cy="0"/>
+        </a:xfrm>
+      </p:grpSpPr>
+      <p:sp>
+        <p:nvSpPr>
+          <p:cNvPr id="2" name="Slide Image Placeholder 1"/>
+          <p:cNvSpPr>
+            <a:spLocks noGrp="1" noRot="1" noChangeAspect="1"/>
+          </p:cNvSpPr>
+          <p:nvPr>
+            <p:ph type="sldImg"/>
+          </p:nvPr>
+        </p:nvSpPr>
+        <p:spPr/>
+      </p:sp>
+      <p:sp>
+        <p:nvSpPr>
+          <p:cNvPr id="3" name="Notes Placeholder 2"/>
+          <p:cNvSpPr>
+            <a:spLocks noGrp="1"/>
+          </p:cNvSpPr>
+          <p:nvPr>
+            <p:ph type="body" idx="1"/>
+          </p:nvPr>
+        </p:nvSpPr>
+        <p:spPr/>
+        <p:txBody>
+          <a:bodyPr/>
+          <a:lstStyle/>
+          <a:p>
+            <a:endParaRPr lang="en-US" dirty="0"/>
+          </a:p>
+        </p:txBody>
+      </p:sp>
+      <p:sp>
+        <p:nvSpPr>
+          <p:cNvPr id="4" name="Slide Number Placeholder 3"/>
+          <p:cNvSpPr>
+            <a:spLocks noGrp="1"/>
+          </p:cNvSpPr>
+          <p:nvPr>
+            <p:ph type="sldNum" sz="quarter" idx="5"/>
+          </p:nvPr>
+        </p:nvSpPr>
+        <p:spPr/>
+        <p:txBody>
+          <a:bodyPr/>
+          <a:lstStyle/>
+          <a:p>
+            <a:fld id="{8EB5F9FD-34E2-F24D-B264-785DF6040375}" type="slidenum">
+              <a:rPr lang="en-US" smtClean="0"/>
+              <a:t>5</a:t>
+            </a:fld>
+            <a:endParaRPr lang="en-US"/>
+          </a:p>
+        </p:txBody>
+      </p:sp>
+    </p:spTree>
+    <p:extLst>
+      <p:ext uri="{BB962C8B-B14F-4D97-AF65-F5344CB8AC3E}">
+        <p14:creationId xmlns:p14="http://schemas.microsoft.com/office/powerpoint/2010/main" val="703638747"/>
       </p:ext>
     </p:extLst>
   </p:cSld>
@@ -3983,35 +4067,44 @@
         </p:nvSpPr>
         <p:spPr/>
         <p:txBody>
+          <a:bodyPr>
+            <a:normAutofit fontScale="90000"/>
+          </a:bodyPr>
+          <a:lstStyle/>
+          <a:p>
+            <a:r>
+              <a:rPr lang="en-US" altLang="zh-CN" dirty="0"/>
+              <a:t>Decoding the Missing Middle Between Patient Evidence and Clinical Guidelines</a:t>
+            </a:r>
+            <a:endParaRPr lang="en-US" dirty="0"/>
+          </a:p>
+        </p:txBody>
+      </p:sp>
+      <p:sp>
+        <p:nvSpPr>
+          <p:cNvPr id="3" name="Subtitle 2">
+            <a:extLst>
+              <a:ext uri="{FF2B5EF4-FFF2-40B4-BE49-F238E27FC236}">
+                <a16:creationId xmlns:a16="http://schemas.microsoft.com/office/drawing/2014/main" id="{173FCC07-A364-87DD-B0F8-C0BCEE54E512}"/>
+              </a:ext>
+            </a:extLst>
+          </p:cNvPr>
+          <p:cNvSpPr>
+            <a:spLocks noGrp="1"/>
+          </p:cNvSpPr>
+          <p:nvPr>
+            <p:ph type="subTitle" idx="1"/>
+          </p:nvPr>
+        </p:nvSpPr>
+        <p:spPr/>
+        <p:txBody>
           <a:bodyPr/>
           <a:lstStyle/>
           <a:p>
-            <a:endParaRPr lang="en-US" dirty="0"/>
-          </a:p>
-        </p:txBody>
-      </p:sp>
-      <p:sp>
-        <p:nvSpPr>
-          <p:cNvPr id="3" name="Subtitle 2">
-            <a:extLst>
-              <a:ext uri="{FF2B5EF4-FFF2-40B4-BE49-F238E27FC236}">
-                <a16:creationId xmlns:a16="http://schemas.microsoft.com/office/drawing/2014/main" id="{173FCC07-A364-87DD-B0F8-C0BCEE54E512}"/>
-              </a:ext>
-            </a:extLst>
-          </p:cNvPr>
-          <p:cNvSpPr>
-            <a:spLocks noGrp="1"/>
-          </p:cNvSpPr>
-          <p:nvPr>
-            <p:ph type="subTitle" idx="1"/>
-          </p:nvPr>
-        </p:nvSpPr>
-        <p:spPr/>
-        <p:txBody>
-          <a:bodyPr/>
-          <a:lstStyle/>
-          <a:p>
-            <a:endParaRPr lang="en-US" dirty="0"/>
+            <a:r>
+              <a:rPr lang="en-US" dirty="0"/>
+              <a:t>An Explicit A/Q/C Framework for Longitudinal Clinical Data</a:t>
+            </a:r>
           </a:p>
         </p:txBody>
       </p:sp>
@@ -6309,7 +6402,71 @@
             </a:r>
             <a:r>
               <a:rPr lang="en-US" altLang="zh-CN" dirty="0"/>
-              <a:t>n</a:t>
+              <a:t>n:</a:t>
+            </a:r>
+            <a:r>
+              <a:rPr lang="zh-CN" altLang="en-US" dirty="0"/>
+              <a:t> </a:t>
+            </a:r>
+            <a:r>
+              <a:rPr lang="en-US" altLang="zh-CN" dirty="0"/>
+              <a:t>Validate</a:t>
+            </a:r>
+            <a:r>
+              <a:rPr lang="zh-CN" altLang="en-US" dirty="0"/>
+              <a:t> </a:t>
+            </a:r>
+            <a:r>
+              <a:rPr lang="en-US" altLang="zh-CN" dirty="0"/>
+              <a:t>A/Q/C</a:t>
+            </a:r>
+            <a:r>
+              <a:rPr lang="zh-CN" altLang="en-US" dirty="0"/>
+              <a:t> </a:t>
+            </a:r>
+            <a:r>
+              <a:rPr lang="en-US" altLang="zh-CN" dirty="0"/>
+              <a:t>&amp;</a:t>
+            </a:r>
+            <a:r>
+              <a:rPr lang="zh-CN" altLang="en-US" dirty="0"/>
+              <a:t> </a:t>
+            </a:r>
+            <a:r>
+              <a:rPr lang="en-US" altLang="zh-CN" dirty="0"/>
+              <a:t>surface</a:t>
+            </a:r>
+            <a:r>
+              <a:rPr lang="zh-CN" altLang="en-US" dirty="0"/>
+              <a:t> </a:t>
+            </a:r>
+            <a:r>
+              <a:rPr lang="en-US" altLang="zh-CN" dirty="0"/>
+              <a:t>knowledge</a:t>
+            </a:r>
+            <a:r>
+              <a:rPr lang="zh-CN" altLang="en-US" dirty="0"/>
+              <a:t> </a:t>
+            </a:r>
+            <a:r>
+              <a:rPr lang="en-US" altLang="zh-CN" dirty="0"/>
+              <a:t>missed</a:t>
+            </a:r>
+            <a:r>
+              <a:rPr lang="zh-CN" altLang="en-US" dirty="0"/>
+              <a:t> </a:t>
+            </a:r>
+            <a:r>
+              <a:rPr lang="en-US" altLang="zh-CN" dirty="0"/>
+              <a:t>by</a:t>
+            </a:r>
+            <a:r>
+              <a:rPr lang="zh-CN" altLang="en-US" dirty="0"/>
+              <a:t> </a:t>
+            </a:r>
+            <a:r>
+              <a:rPr lang="en-US" altLang="zh-CN" dirty="0"/>
+              <a:t>guidelines</a:t>
             </a:r>
             <a:endParaRPr lang="en-US" dirty="0"/>
           </a:p>
@@ -6334,14 +6491,359 @@
         <p:spPr/>
         <p:txBody>
           <a:bodyPr>
-            <a:normAutofit/>
+            <a:normAutofit lnSpcReduction="10000"/>
           </a:bodyPr>
           <a:lstStyle/>
           <a:p>
+            <a:pPr marL="0" indent="0">
+              <a:buNone/>
+            </a:pPr>
+            <a:r>
+              <a:rPr lang="en-US" altLang="zh-CN" b="1" dirty="0"/>
+              <a:t>Validate</a:t>
+            </a:r>
+            <a:r>
+              <a:rPr lang="zh-CN" altLang="en-US" b="1" dirty="0"/>
+              <a:t> </a:t>
+            </a:r>
+            <a:r>
+              <a:rPr lang="en-US" altLang="zh-CN" b="1" dirty="0"/>
+              <a:t>the</a:t>
+            </a:r>
+            <a:r>
+              <a:rPr lang="zh-CN" altLang="en-US" b="1" dirty="0"/>
+              <a:t> </a:t>
+            </a:r>
+            <a:r>
+              <a:rPr lang="en-US" altLang="zh-CN" b="1" dirty="0"/>
+              <a:t>Representation</a:t>
+            </a:r>
+          </a:p>
+          <a:p>
+            <a:r>
+              <a:rPr lang="en-US" altLang="zh-CN" dirty="0"/>
+              <a:t>Does</a:t>
+            </a:r>
+            <a:r>
+              <a:rPr lang="zh-CN" altLang="en-US" dirty="0"/>
+              <a:t> </a:t>
+            </a:r>
+            <a:r>
+              <a:rPr lang="en-US" altLang="zh-CN" dirty="0"/>
+              <a:t>the</a:t>
+            </a:r>
+            <a:r>
+              <a:rPr lang="zh-CN" altLang="en-US" dirty="0"/>
+              <a:t> </a:t>
+            </a:r>
+            <a:r>
+              <a:rPr lang="en-US" altLang="zh-CN" dirty="0"/>
+              <a:t>A/Q/C</a:t>
+            </a:r>
+            <a:r>
+              <a:rPr lang="zh-CN" altLang="en-US" dirty="0"/>
+              <a:t> </a:t>
+            </a:r>
+            <a:r>
+              <a:rPr lang="en-US" altLang="zh-CN" dirty="0"/>
+              <a:t>framework</a:t>
+            </a:r>
+            <a:r>
+              <a:rPr lang="zh-CN" altLang="en-US" dirty="0"/>
+              <a:t> </a:t>
+            </a:r>
+            <a:r>
+              <a:rPr lang="en-US" altLang="zh-CN" dirty="0"/>
+              <a:t>really</a:t>
+            </a:r>
+            <a:r>
+              <a:rPr lang="zh-CN" altLang="en-US" dirty="0"/>
+              <a:t> </a:t>
+            </a:r>
+            <a:r>
+              <a:rPr lang="en-US" altLang="zh-CN" dirty="0"/>
+              <a:t>capture</a:t>
+            </a:r>
+            <a:r>
+              <a:rPr lang="zh-CN" altLang="en-US" dirty="0"/>
+              <a:t> </a:t>
+            </a:r>
+            <a:r>
+              <a:rPr lang="en-US" altLang="zh-CN" dirty="0"/>
+              <a:t>the</a:t>
+            </a:r>
+            <a:r>
+              <a:rPr lang="zh-CN" altLang="en-US" dirty="0"/>
+              <a:t> </a:t>
+            </a:r>
+            <a:r>
+              <a:rPr lang="en-US" altLang="zh-CN" dirty="0"/>
+              <a:t>epistemic</a:t>
+            </a:r>
+            <a:r>
+              <a:rPr lang="zh-CN" altLang="en-US" dirty="0"/>
+              <a:t> </a:t>
+            </a:r>
+            <a:r>
+              <a:rPr lang="en-US" altLang="zh-CN" dirty="0"/>
+              <a:t>state</a:t>
+            </a:r>
+            <a:r>
+              <a:rPr lang="zh-CN" altLang="en-US" dirty="0"/>
+              <a:t> </a:t>
+            </a:r>
+            <a:r>
+              <a:rPr lang="en-US" altLang="zh-CN" dirty="0"/>
+              <a:t>driving</a:t>
+            </a:r>
+            <a:r>
+              <a:rPr lang="zh-CN" altLang="en-US" dirty="0"/>
+              <a:t> </a:t>
+            </a:r>
+            <a:r>
+              <a:rPr lang="en-US" altLang="zh-CN" dirty="0"/>
+              <a:t>the</a:t>
+            </a:r>
+            <a:r>
+              <a:rPr lang="zh-CN" altLang="en-US" dirty="0"/>
+              <a:t> </a:t>
+            </a:r>
+            <a:r>
+              <a:rPr lang="en-US" altLang="zh-CN" dirty="0"/>
+              <a:t>decision?</a:t>
+            </a:r>
+          </a:p>
+          <a:p>
+            <a:r>
+              <a:rPr lang="en-US" altLang="zh-CN" dirty="0"/>
+              <a:t>Steps:</a:t>
+            </a:r>
+            <a:r>
+              <a:rPr lang="zh-CN" altLang="en-US" dirty="0"/>
+              <a:t> </a:t>
+            </a:r>
             <a:r>
               <a:rPr lang="en-US" dirty="0"/>
-              <a:t>Goal: </a:t>
-            </a:r>
+              <a:t>Pre-order patient record</a:t>
+            </a:r>
+            <a:r>
+              <a:rPr lang="zh-CN" altLang="en-US" dirty="0"/>
+              <a:t> </a:t>
+            </a:r>
+            <a:r>
+              <a:rPr lang="en-US" altLang="zh-CN" dirty="0">
+                <a:sym typeface="Wingdings" pitchFamily="2" charset="2"/>
+              </a:rPr>
+              <a:t></a:t>
+            </a:r>
+            <a:r>
+              <a:rPr lang="en-US" dirty="0"/>
+              <a:t> infer A/Q/C</a:t>
+            </a:r>
+            <a:r>
+              <a:rPr lang="zh-CN" altLang="en-US" dirty="0"/>
+              <a:t> </a:t>
+            </a:r>
+            <a:r>
+              <a:rPr lang="en-US" altLang="zh-CN" dirty="0">
+                <a:sym typeface="Wingdings" pitchFamily="2" charset="2"/>
+              </a:rPr>
+              <a:t></a:t>
+            </a:r>
+            <a:r>
+              <a:rPr lang="en-US" dirty="0"/>
+              <a:t> predict the next test ordered</a:t>
+            </a:r>
+          </a:p>
+          <a:p>
+            <a:pPr marL="0" indent="0">
+              <a:buNone/>
+            </a:pPr>
+            <a:r>
+              <a:rPr lang="en-US" altLang="zh-CN" b="1" dirty="0"/>
+              <a:t>Discover</a:t>
+            </a:r>
+            <a:r>
+              <a:rPr lang="zh-CN" altLang="en-US" b="1" dirty="0"/>
+              <a:t> </a:t>
+            </a:r>
+            <a:r>
+              <a:rPr lang="en-US" altLang="zh-CN" b="1" dirty="0"/>
+              <a:t>Missing</a:t>
+            </a:r>
+            <a:r>
+              <a:rPr lang="zh-CN" altLang="en-US" b="1" dirty="0"/>
+              <a:t> </a:t>
+            </a:r>
+            <a:r>
+              <a:rPr lang="en-US" altLang="zh-CN" b="1" dirty="0"/>
+              <a:t>Knowledge</a:t>
+            </a:r>
+          </a:p>
+          <a:p>
+            <a:r>
+              <a:rPr lang="en-US" dirty="0"/>
+              <a:t>What recurrent decision logic is absent from the guideline?</a:t>
+            </a:r>
+          </a:p>
+          <a:p>
+            <a:r>
+              <a:rPr lang="en-US" altLang="zh-CN" dirty="0"/>
+              <a:t>Steps:</a:t>
+            </a:r>
+            <a:r>
+              <a:rPr lang="zh-CN" altLang="en-US" dirty="0"/>
+              <a:t> </a:t>
+            </a:r>
+            <a:r>
+              <a:rPr lang="en-US" dirty="0"/>
+              <a:t>A/Q/C trajectories</a:t>
+            </a:r>
+            <a:r>
+              <a:rPr lang="zh-CN" altLang="en-US" dirty="0"/>
+              <a:t> </a:t>
+            </a:r>
+            <a:r>
+              <a:rPr lang="en-US" altLang="zh-CN" dirty="0">
+                <a:sym typeface="Wingdings" pitchFamily="2" charset="2"/>
+              </a:rPr>
+              <a:t></a:t>
+            </a:r>
+            <a:r>
+              <a:rPr lang="en-US" dirty="0"/>
+              <a:t> identify recurring </a:t>
+            </a:r>
+            <a:r>
+              <a:rPr lang="en-US" altLang="zh-CN" dirty="0"/>
+              <a:t>coverage</a:t>
+            </a:r>
+            <a:r>
+              <a:rPr lang="zh-CN" altLang="en-US" dirty="0"/>
+              <a:t> </a:t>
+            </a:r>
+            <a:r>
+              <a:rPr lang="en-US" altLang="zh-CN" dirty="0"/>
+              <a:t>gaps</a:t>
+            </a:r>
+            <a:r>
+              <a:rPr lang="zh-CN" altLang="en-US" dirty="0"/>
+              <a:t> </a:t>
+            </a:r>
+            <a:r>
+              <a:rPr lang="en-US" altLang="zh-CN" dirty="0"/>
+              <a:t>and</a:t>
+            </a:r>
+            <a:r>
+              <a:rPr lang="zh-CN" altLang="en-US" dirty="0"/>
+              <a:t> </a:t>
+            </a:r>
+            <a:r>
+              <a:rPr lang="en-US" dirty="0"/>
+              <a:t>state transitions</a:t>
+            </a:r>
+            <a:r>
+              <a:rPr lang="zh-CN" altLang="en-US" dirty="0"/>
+              <a:t> </a:t>
+            </a:r>
+            <a:r>
+              <a:rPr lang="en-US" altLang="zh-CN" dirty="0">
+                <a:sym typeface="Wingdings" pitchFamily="2" charset="2"/>
+              </a:rPr>
+              <a:t></a:t>
+            </a:r>
+            <a:r>
+              <a:rPr lang="en-US" dirty="0"/>
+              <a:t> validate across patients and with </a:t>
+            </a:r>
+            <a:r>
+              <a:rPr lang="en-US" altLang="zh-CN" dirty="0"/>
+              <a:t>doctors</a:t>
+            </a:r>
+            <a:r>
+              <a:rPr lang="zh-CN" altLang="en-US" dirty="0"/>
+              <a:t> </a:t>
+            </a:r>
+            <a:r>
+              <a:rPr lang="en-US" altLang="zh-CN" dirty="0"/>
+              <a:t>(Dennis)</a:t>
+            </a:r>
+            <a:endParaRPr lang="en-US" dirty="0"/>
+          </a:p>
+        </p:txBody>
+      </p:sp>
+      <p:sp>
+        <p:nvSpPr>
+          <p:cNvPr id="4" name="TextBox 3">
+            <a:extLst>
+              <a:ext uri="{FF2B5EF4-FFF2-40B4-BE49-F238E27FC236}">
+                <a16:creationId xmlns:a16="http://schemas.microsoft.com/office/drawing/2014/main" id="{1DB159D0-1DBA-49EB-7304-0468F588A0FD}"/>
+              </a:ext>
+            </a:extLst>
+          </p:cNvPr>
+          <p:cNvSpPr txBox="1"/>
+          <p:nvPr/>
+        </p:nvSpPr>
+        <p:spPr>
+          <a:xfrm>
+            <a:off x="838200" y="6226175"/>
+            <a:ext cx="7673832" cy="461665"/>
+          </a:xfrm>
+          <a:prstGeom prst="rect">
+            <a:avLst/>
+          </a:prstGeom>
+          <a:noFill/>
+        </p:spPr>
+        <p:txBody>
+          <a:bodyPr wrap="none" rtlCol="0">
+            <a:spAutoFit/>
+          </a:bodyPr>
+          <a:lstStyle/>
+          <a:p>
+            <a:r>
+              <a:rPr lang="en-US" altLang="zh-CN" sz="2400" i="1" dirty="0"/>
+              <a:t>Advantage</a:t>
+            </a:r>
+            <a:r>
+              <a:rPr lang="zh-CN" altLang="en-US" sz="2400" i="1" dirty="0"/>
+              <a:t> </a:t>
+            </a:r>
+            <a:r>
+              <a:rPr lang="en-US" altLang="zh-CN" sz="2400" i="1" dirty="0"/>
+              <a:t>over</a:t>
+            </a:r>
+            <a:r>
+              <a:rPr lang="zh-CN" altLang="en-US" sz="2400" i="1" dirty="0"/>
+              <a:t> </a:t>
+            </a:r>
+            <a:r>
+              <a:rPr lang="en-US" altLang="zh-CN" sz="2400" i="1" dirty="0"/>
+              <a:t>agent:</a:t>
+            </a:r>
+            <a:r>
+              <a:rPr lang="zh-CN" altLang="en-US" sz="2400" i="1" dirty="0"/>
+              <a:t> </a:t>
+            </a:r>
+            <a:r>
+              <a:rPr lang="en-US" altLang="zh-CN" sz="2400" i="1" dirty="0"/>
+              <a:t>interpretable,</a:t>
+            </a:r>
+            <a:r>
+              <a:rPr lang="zh-CN" altLang="en-US" sz="2400" i="1" dirty="0"/>
+              <a:t> </a:t>
+            </a:r>
+            <a:r>
+              <a:rPr lang="en-US" altLang="zh-CN" sz="2400" i="1" dirty="0"/>
+              <a:t>reusable</a:t>
+            </a:r>
+            <a:r>
+              <a:rPr lang="zh-CN" altLang="en-US" sz="2400" i="1" dirty="0"/>
+              <a:t> </a:t>
+            </a:r>
+            <a:r>
+              <a:rPr lang="en-US" altLang="zh-CN" sz="2400" i="1" dirty="0"/>
+              <a:t>knowledge</a:t>
+            </a:r>
+            <a:endParaRPr lang="en-US" sz="2400" i="1" dirty="0"/>
           </a:p>
         </p:txBody>
       </p:sp>
